--- a/assets/powerpoints/module-pub/A4-les-valeurs-des-publicites.pptx
+++ b/assets/powerpoints/module-pub/A4-les-valeurs-des-publicites.pptx
@@ -4578,7 +4578,7 @@
                 </a:solidFill>
                 <a:latin typeface="Verdana"/>
               </a:rPr>
-              <a:t>SÉANCE A4  ·  MODULE 7</a:t>
+              <a:t>SÉANCE A4  ·  MODULE 8</a:t>
             </a:r>
           </a:p>
         </p:txBody>

--- a/assets/powerpoints/module-pub/A4-les-valeurs-des-publicites.pptx
+++ b/assets/powerpoints/module-pub/A4-les-valeurs-des-publicites.pptx
@@ -4574,7 +4574,7 @@
             <a:r>
               <a:rPr sz="1300" b="1" i="0" spc="156">
                 <a:solidFill>
-                  <a:srgbClr val="166534"/>
+                  <a:srgbClr val="A5335F"/>
                 </a:solidFill>
                 <a:latin typeface="Verdana"/>
               </a:rPr>
@@ -4914,7 +4914,7 @@
             <a:r>
               <a:rPr sz="1300" b="1" i="0" spc="156">
                 <a:solidFill>
-                  <a:srgbClr val="166534"/>
+                  <a:srgbClr val="A5335F"/>
                 </a:solidFill>
                 <a:latin typeface="Verdana"/>
               </a:rPr>
@@ -5463,7 +5463,7 @@
             <a:r>
               <a:rPr sz="1300" b="1" i="0" spc="156">
                 <a:solidFill>
-                  <a:srgbClr val="166534"/>
+                  <a:srgbClr val="A5335F"/>
                 </a:solidFill>
                 <a:latin typeface="Verdana"/>
               </a:rPr>
@@ -6012,7 +6012,7 @@
             <a:r>
               <a:rPr sz="1300" b="1" i="0" spc="156">
                 <a:solidFill>
-                  <a:srgbClr val="166534"/>
+                  <a:srgbClr val="A5335F"/>
                 </a:solidFill>
                 <a:latin typeface="Verdana"/>
               </a:rPr>
@@ -6162,7 +6162,7 @@
             </a:avLst>
           </a:prstGeom>
           <a:solidFill>
-            <a:srgbClr val="E3F1E7"/>
+            <a:srgbClr val="FCE9F0"/>
           </a:solidFill>
           <a:ln>
             <a:noFill/>
@@ -6219,7 +6219,7 @@
             <a:r>
               <a:rPr sz="1500" b="1" i="0">
                 <a:solidFill>
-                  <a:srgbClr val="166534"/>
+                  <a:srgbClr val="A5335F"/>
                 </a:solidFill>
                 <a:latin typeface="Verdana"/>
               </a:rPr>
@@ -6330,7 +6330,7 @@
             </a:avLst>
           </a:prstGeom>
           <a:solidFill>
-            <a:srgbClr val="E3F1E7"/>
+            <a:srgbClr val="FCE9F0"/>
           </a:solidFill>
           <a:ln>
             <a:noFill/>
@@ -6387,7 +6387,7 @@
             <a:r>
               <a:rPr sz="1500" b="1" i="0">
                 <a:solidFill>
-                  <a:srgbClr val="166534"/>
+                  <a:srgbClr val="A5335F"/>
                 </a:solidFill>
                 <a:latin typeface="Verdana"/>
               </a:rPr>
@@ -6498,7 +6498,7 @@
             </a:avLst>
           </a:prstGeom>
           <a:solidFill>
-            <a:srgbClr val="E3F1E7"/>
+            <a:srgbClr val="FCE9F0"/>
           </a:solidFill>
           <a:ln>
             <a:noFill/>
@@ -6555,7 +6555,7 @@
             <a:r>
               <a:rPr sz="1500" b="1" i="0">
                 <a:solidFill>
-                  <a:srgbClr val="166534"/>
+                  <a:srgbClr val="A5335F"/>
                 </a:solidFill>
                 <a:latin typeface="Verdana"/>
               </a:rPr>
@@ -6666,7 +6666,7 @@
             </a:avLst>
           </a:prstGeom>
           <a:solidFill>
-            <a:srgbClr val="E3F1E7"/>
+            <a:srgbClr val="FCE9F0"/>
           </a:solidFill>
           <a:ln>
             <a:noFill/>
@@ -6723,7 +6723,7 @@
             <a:r>
               <a:rPr sz="1500" b="1" i="0">
                 <a:solidFill>
-                  <a:srgbClr val="166534"/>
+                  <a:srgbClr val="A5335F"/>
                 </a:solidFill>
                 <a:latin typeface="Verdana"/>
               </a:rPr>
@@ -6939,7 +6939,7 @@
             <a:r>
               <a:rPr sz="1300" b="1" i="0" spc="156">
                 <a:solidFill>
-                  <a:srgbClr val="166534"/>
+                  <a:srgbClr val="A5335F"/>
                 </a:solidFill>
                 <a:latin typeface="Verdana"/>
               </a:rPr>
@@ -7089,7 +7089,7 @@
             </a:avLst>
           </a:prstGeom>
           <a:solidFill>
-            <a:srgbClr val="E3F1E7"/>
+            <a:srgbClr val="FCE9F0"/>
           </a:solidFill>
           <a:ln>
             <a:noFill/>
@@ -7146,7 +7146,7 @@
             <a:r>
               <a:rPr sz="1500" b="1" i="0">
                 <a:solidFill>
-                  <a:srgbClr val="166534"/>
+                  <a:srgbClr val="A5335F"/>
                 </a:solidFill>
                 <a:latin typeface="Verdana"/>
               </a:rPr>
@@ -7266,7 +7266,7 @@
             </a:avLst>
           </a:prstGeom>
           <a:solidFill>
-            <a:srgbClr val="E3F1E7"/>
+            <a:srgbClr val="FCE9F0"/>
           </a:solidFill>
           <a:ln>
             <a:noFill/>
@@ -7323,7 +7323,7 @@
             <a:r>
               <a:rPr sz="1500" b="1" i="0">
                 <a:solidFill>
-                  <a:srgbClr val="166534"/>
+                  <a:srgbClr val="A5335F"/>
                 </a:solidFill>
                 <a:latin typeface="Verdana"/>
               </a:rPr>
@@ -7443,7 +7443,7 @@
             </a:avLst>
           </a:prstGeom>
           <a:solidFill>
-            <a:srgbClr val="E3F1E7"/>
+            <a:srgbClr val="FCE9F0"/>
           </a:solidFill>
           <a:ln>
             <a:noFill/>
@@ -7500,7 +7500,7 @@
             <a:r>
               <a:rPr sz="1500" b="1" i="0">
                 <a:solidFill>
-                  <a:srgbClr val="166534"/>
+                  <a:srgbClr val="A5335F"/>
                 </a:solidFill>
                 <a:latin typeface="Verdana"/>
               </a:rPr>
@@ -7620,7 +7620,7 @@
             </a:avLst>
           </a:prstGeom>
           <a:solidFill>
-            <a:srgbClr val="E3F1E7"/>
+            <a:srgbClr val="FCE9F0"/>
           </a:solidFill>
           <a:ln>
             <a:noFill/>
@@ -7677,7 +7677,7 @@
             <a:r>
               <a:rPr sz="1500" b="1" i="0">
                 <a:solidFill>
-                  <a:srgbClr val="166534"/>
+                  <a:srgbClr val="A5335F"/>
                 </a:solidFill>
                 <a:latin typeface="Verdana"/>
               </a:rPr>
@@ -7902,7 +7902,7 @@
             <a:r>
               <a:rPr sz="1300" b="1" i="0" spc="156">
                 <a:solidFill>
-                  <a:srgbClr val="166534"/>
+                  <a:srgbClr val="A5335F"/>
                 </a:solidFill>
                 <a:latin typeface="Verdana"/>
               </a:rPr>
@@ -8052,7 +8052,7 @@
             </a:avLst>
           </a:prstGeom>
           <a:solidFill>
-            <a:srgbClr val="E3F1E7"/>
+            <a:srgbClr val="FCE9F0"/>
           </a:solidFill>
           <a:ln>
             <a:noFill/>
@@ -8109,7 +8109,7 @@
             <a:r>
               <a:rPr sz="1500" b="1" i="0">
                 <a:solidFill>
-                  <a:srgbClr val="166534"/>
+                  <a:srgbClr val="A5335F"/>
                 </a:solidFill>
                 <a:latin typeface="Verdana"/>
               </a:rPr>
@@ -8220,7 +8220,7 @@
             </a:avLst>
           </a:prstGeom>
           <a:solidFill>
-            <a:srgbClr val="E3F1E7"/>
+            <a:srgbClr val="FCE9F0"/>
           </a:solidFill>
           <a:ln>
             <a:noFill/>
@@ -8277,7 +8277,7 @@
             <a:r>
               <a:rPr sz="1500" b="1" i="0">
                 <a:solidFill>
-                  <a:srgbClr val="166534"/>
+                  <a:srgbClr val="A5335F"/>
                 </a:solidFill>
                 <a:latin typeface="Verdana"/>
               </a:rPr>
@@ -8388,7 +8388,7 @@
             </a:avLst>
           </a:prstGeom>
           <a:solidFill>
-            <a:srgbClr val="E3F1E7"/>
+            <a:srgbClr val="FCE9F0"/>
           </a:solidFill>
           <a:ln>
             <a:noFill/>
@@ -8445,7 +8445,7 @@
             <a:r>
               <a:rPr sz="1500" b="1" i="0">
                 <a:solidFill>
-                  <a:srgbClr val="166534"/>
+                  <a:srgbClr val="A5335F"/>
                 </a:solidFill>
                 <a:latin typeface="Verdana"/>
               </a:rPr>
@@ -8556,7 +8556,7 @@
             </a:avLst>
           </a:prstGeom>
           <a:solidFill>
-            <a:srgbClr val="E3F1E7"/>
+            <a:srgbClr val="FCE9F0"/>
           </a:solidFill>
           <a:ln>
             <a:noFill/>
@@ -8613,7 +8613,7 @@
             <a:r>
               <a:rPr sz="1500" b="1" i="0">
                 <a:solidFill>
-                  <a:srgbClr val="166534"/>
+                  <a:srgbClr val="A5335F"/>
                 </a:solidFill>
                 <a:latin typeface="Verdana"/>
               </a:rPr>
@@ -9292,7 +9292,7 @@
             <a:r>
               <a:rPr sz="1300" b="1" i="0" spc="156">
                 <a:solidFill>
-                  <a:srgbClr val="166534"/>
+                  <a:srgbClr val="A5335F"/>
                 </a:solidFill>
                 <a:latin typeface="Verdana"/>
               </a:rPr>
@@ -9403,7 +9403,7 @@
             </a:avLst>
           </a:prstGeom>
           <a:solidFill>
-            <a:srgbClr val="E3F1E7"/>
+            <a:srgbClr val="FCE9F0"/>
           </a:solidFill>
           <a:ln>
             <a:noFill/>
@@ -9460,7 +9460,7 @@
             <a:r>
               <a:rPr sz="1500" b="1" i="0">
                 <a:solidFill>
-                  <a:srgbClr val="166534"/>
+                  <a:srgbClr val="A5335F"/>
                 </a:solidFill>
                 <a:latin typeface="Verdana"/>
               </a:rPr>
@@ -9571,7 +9571,7 @@
             </a:avLst>
           </a:prstGeom>
           <a:solidFill>
-            <a:srgbClr val="E3F1E7"/>
+            <a:srgbClr val="FCE9F0"/>
           </a:solidFill>
           <a:ln>
             <a:noFill/>
@@ -9628,7 +9628,7 @@
             <a:r>
               <a:rPr sz="1500" b="1" i="0">
                 <a:solidFill>
-                  <a:srgbClr val="166534"/>
+                  <a:srgbClr val="A5335F"/>
                 </a:solidFill>
                 <a:latin typeface="Verdana"/>
               </a:rPr>
@@ -9739,7 +9739,7 @@
             </a:avLst>
           </a:prstGeom>
           <a:solidFill>
-            <a:srgbClr val="E3F1E7"/>
+            <a:srgbClr val="FCE9F0"/>
           </a:solidFill>
           <a:ln>
             <a:noFill/>
@@ -9796,7 +9796,7 @@
             <a:r>
               <a:rPr sz="1500" b="1" i="0">
                 <a:solidFill>
-                  <a:srgbClr val="166534"/>
+                  <a:srgbClr val="A5335F"/>
                 </a:solidFill>
                 <a:latin typeface="Verdana"/>
               </a:rPr>
@@ -9907,7 +9907,7 @@
             </a:avLst>
           </a:prstGeom>
           <a:solidFill>
-            <a:srgbClr val="E3F1E7"/>
+            <a:srgbClr val="FCE9F0"/>
           </a:solidFill>
           <a:ln>
             <a:noFill/>
@@ -9964,7 +9964,7 @@
             <a:r>
               <a:rPr sz="1500" b="1" i="0">
                 <a:solidFill>
-                  <a:srgbClr val="166534"/>
+                  <a:srgbClr val="A5335F"/>
                 </a:solidFill>
                 <a:latin typeface="Verdana"/>
               </a:rPr>
@@ -10180,7 +10180,7 @@
             <a:r>
               <a:rPr sz="1300" b="1" i="0" spc="156">
                 <a:solidFill>
-                  <a:srgbClr val="166534"/>
+                  <a:srgbClr val="A5335F"/>
                 </a:solidFill>
                 <a:latin typeface="Verdana"/>
               </a:rPr>
@@ -10206,7 +10206,7 @@
             </a:avLst>
           </a:prstGeom>
           <a:solidFill>
-            <a:srgbClr val="E3F1E7"/>
+            <a:srgbClr val="FCE9F0"/>
           </a:solidFill>
           <a:ln w="12700">
             <a:solidFill>
@@ -10527,7 +10527,7 @@
             <a:r>
               <a:rPr sz="1300" b="1" i="0" spc="156">
                 <a:solidFill>
-                  <a:srgbClr val="166534"/>
+                  <a:srgbClr val="A5335F"/>
                 </a:solidFill>
                 <a:latin typeface="Verdana"/>
               </a:rPr>
@@ -10768,7 +10768,7 @@
             <a:r>
               <a:rPr sz="1800" b="1" i="0">
                 <a:solidFill>
-                  <a:srgbClr val="166534"/>
+                  <a:srgbClr val="A5335F"/>
                 </a:solidFill>
                 <a:latin typeface="Verdana"/>
               </a:rPr>
@@ -10927,7 +10927,7 @@
             <a:r>
               <a:rPr sz="1800" b="1" i="0">
                 <a:solidFill>
-                  <a:srgbClr val="166534"/>
+                  <a:srgbClr val="A5335F"/>
                 </a:solidFill>
                 <a:latin typeface="Verdana"/>
               </a:rPr>
@@ -11086,7 +11086,7 @@
             <a:r>
               <a:rPr sz="1800" b="1" i="0">
                 <a:solidFill>
-                  <a:srgbClr val="166534"/>
+                  <a:srgbClr val="A5335F"/>
                 </a:solidFill>
                 <a:latin typeface="Verdana"/>
               </a:rPr>
@@ -11245,7 +11245,7 @@
             <a:r>
               <a:rPr sz="1800" b="1" i="0">
                 <a:solidFill>
-                  <a:srgbClr val="166534"/>
+                  <a:srgbClr val="A5335F"/>
                 </a:solidFill>
                 <a:latin typeface="Verdana"/>
               </a:rPr>
@@ -11404,7 +11404,7 @@
             <a:r>
               <a:rPr sz="1800" b="1" i="0">
                 <a:solidFill>
-                  <a:srgbClr val="166534"/>
+                  <a:srgbClr val="A5335F"/>
                 </a:solidFill>
                 <a:latin typeface="Verdana"/>
               </a:rPr>
@@ -11659,7 +11659,7 @@
             <a:r>
               <a:rPr sz="1300" b="1" i="0" spc="156">
                 <a:solidFill>
-                  <a:srgbClr val="166534"/>
+                  <a:srgbClr val="A5335F"/>
                 </a:solidFill>
                 <a:latin typeface="Verdana"/>
               </a:rPr>
@@ -11783,7 +11783,7 @@
             <a:r>
               <a:rPr sz="2400" b="1" i="0">
                 <a:solidFill>
-                  <a:srgbClr val="166534"/>
+                  <a:srgbClr val="A5335F"/>
                 </a:solidFill>
                 <a:latin typeface="Verdana"/>
               </a:rPr>
@@ -11907,7 +11907,7 @@
             <a:r>
               <a:rPr sz="2400" b="1" i="0">
                 <a:solidFill>
-                  <a:srgbClr val="166534"/>
+                  <a:srgbClr val="A5335F"/>
                 </a:solidFill>
                 <a:latin typeface="Verdana"/>
               </a:rPr>
@@ -12031,7 +12031,7 @@
             <a:r>
               <a:rPr sz="2400" b="1" i="0">
                 <a:solidFill>
-                  <a:srgbClr val="166534"/>
+                  <a:srgbClr val="A5335F"/>
                 </a:solidFill>
                 <a:latin typeface="Verdana"/>
               </a:rPr>
@@ -12155,7 +12155,7 @@
             <a:r>
               <a:rPr sz="2400" b="1" i="0">
                 <a:solidFill>
-                  <a:srgbClr val="166534"/>
+                  <a:srgbClr val="A5335F"/>
                 </a:solidFill>
                 <a:latin typeface="Verdana"/>
               </a:rPr>
@@ -12371,7 +12371,7 @@
             <a:r>
               <a:rPr sz="1300" b="1" i="0" spc="156">
                 <a:solidFill>
-                  <a:srgbClr val="166534"/>
+                  <a:srgbClr val="A5335F"/>
                 </a:solidFill>
                 <a:latin typeface="Verdana"/>
               </a:rPr>
@@ -12521,7 +12521,7 @@
             </a:avLst>
           </a:prstGeom>
           <a:solidFill>
-            <a:srgbClr val="E3F1E7"/>
+            <a:srgbClr val="FCE9F0"/>
           </a:solidFill>
           <a:ln>
             <a:noFill/>
@@ -12578,7 +12578,7 @@
             <a:r>
               <a:rPr sz="1500" b="1" i="0">
                 <a:solidFill>
-                  <a:srgbClr val="166534"/>
+                  <a:srgbClr val="A5335F"/>
                 </a:solidFill>
                 <a:latin typeface="Verdana"/>
               </a:rPr>
@@ -12689,7 +12689,7 @@
             </a:avLst>
           </a:prstGeom>
           <a:solidFill>
-            <a:srgbClr val="E3F1E7"/>
+            <a:srgbClr val="FCE9F0"/>
           </a:solidFill>
           <a:ln>
             <a:noFill/>
@@ -12746,7 +12746,7 @@
             <a:r>
               <a:rPr sz="1500" b="1" i="0">
                 <a:solidFill>
-                  <a:srgbClr val="166534"/>
+                  <a:srgbClr val="A5335F"/>
                 </a:solidFill>
                 <a:latin typeface="Verdana"/>
               </a:rPr>
@@ -12857,7 +12857,7 @@
             </a:avLst>
           </a:prstGeom>
           <a:solidFill>
-            <a:srgbClr val="E3F1E7"/>
+            <a:srgbClr val="FCE9F0"/>
           </a:solidFill>
           <a:ln>
             <a:noFill/>
@@ -12914,7 +12914,7 @@
             <a:r>
               <a:rPr sz="1500" b="1" i="0">
                 <a:solidFill>
-                  <a:srgbClr val="166534"/>
+                  <a:srgbClr val="A5335F"/>
                 </a:solidFill>
                 <a:latin typeface="Verdana"/>
               </a:rPr>
@@ -13025,7 +13025,7 @@
             </a:avLst>
           </a:prstGeom>
           <a:solidFill>
-            <a:srgbClr val="E3F1E7"/>
+            <a:srgbClr val="FCE9F0"/>
           </a:solidFill>
           <a:ln>
             <a:noFill/>
@@ -13082,7 +13082,7 @@
             <a:r>
               <a:rPr sz="1500" b="1" i="0">
                 <a:solidFill>
-                  <a:srgbClr val="166534"/>
+                  <a:srgbClr val="A5335F"/>
                 </a:solidFill>
                 <a:latin typeface="Verdana"/>
               </a:rPr>
@@ -13193,7 +13193,7 @@
             </a:avLst>
           </a:prstGeom>
           <a:solidFill>
-            <a:srgbClr val="E3F1E7"/>
+            <a:srgbClr val="FCE9F0"/>
           </a:solidFill>
           <a:ln>
             <a:noFill/>
@@ -13250,7 +13250,7 @@
             <a:r>
               <a:rPr sz="1500" b="1" i="0">
                 <a:solidFill>
-                  <a:srgbClr val="166534"/>
+                  <a:srgbClr val="A5335F"/>
                 </a:solidFill>
                 <a:latin typeface="Verdana"/>
               </a:rPr>
@@ -13466,7 +13466,7 @@
             <a:r>
               <a:rPr sz="1300" b="1" i="0" spc="156">
                 <a:solidFill>
-                  <a:srgbClr val="166534"/>
+                  <a:srgbClr val="A5335F"/>
                 </a:solidFill>
                 <a:latin typeface="Verdana"/>
               </a:rPr>
@@ -13616,7 +13616,7 @@
             </a:avLst>
           </a:prstGeom>
           <a:solidFill>
-            <a:srgbClr val="E3F1E7"/>
+            <a:srgbClr val="FCE9F0"/>
           </a:solidFill>
           <a:ln>
             <a:noFill/>
@@ -13673,7 +13673,7 @@
             <a:r>
               <a:rPr sz="1500" b="1" i="0">
                 <a:solidFill>
-                  <a:srgbClr val="166534"/>
+                  <a:srgbClr val="A5335F"/>
                 </a:solidFill>
                 <a:latin typeface="Verdana"/>
               </a:rPr>
@@ -13793,7 +13793,7 @@
             </a:avLst>
           </a:prstGeom>
           <a:solidFill>
-            <a:srgbClr val="E3F1E7"/>
+            <a:srgbClr val="FCE9F0"/>
           </a:solidFill>
           <a:ln>
             <a:noFill/>
@@ -13850,7 +13850,7 @@
             <a:r>
               <a:rPr sz="1500" b="1" i="0">
                 <a:solidFill>
-                  <a:srgbClr val="166534"/>
+                  <a:srgbClr val="A5335F"/>
                 </a:solidFill>
                 <a:latin typeface="Verdana"/>
               </a:rPr>
@@ -13970,7 +13970,7 @@
             </a:avLst>
           </a:prstGeom>
           <a:solidFill>
-            <a:srgbClr val="E3F1E7"/>
+            <a:srgbClr val="FCE9F0"/>
           </a:solidFill>
           <a:ln>
             <a:noFill/>
@@ -14027,7 +14027,7 @@
             <a:r>
               <a:rPr sz="1500" b="1" i="0">
                 <a:solidFill>
-                  <a:srgbClr val="166534"/>
+                  <a:srgbClr val="A5335F"/>
                 </a:solidFill>
                 <a:latin typeface="Verdana"/>
               </a:rPr>
@@ -14147,7 +14147,7 @@
             </a:avLst>
           </a:prstGeom>
           <a:solidFill>
-            <a:srgbClr val="E3F1E7"/>
+            <a:srgbClr val="FCE9F0"/>
           </a:solidFill>
           <a:ln>
             <a:noFill/>
@@ -14204,7 +14204,7 @@
             <a:r>
               <a:rPr sz="1500" b="1" i="0">
                 <a:solidFill>
-                  <a:srgbClr val="166534"/>
+                  <a:srgbClr val="A5335F"/>
                 </a:solidFill>
                 <a:latin typeface="Verdana"/>
               </a:rPr>
@@ -14324,7 +14324,7 @@
             </a:avLst>
           </a:prstGeom>
           <a:solidFill>
-            <a:srgbClr val="E3F1E7"/>
+            <a:srgbClr val="FCE9F0"/>
           </a:solidFill>
           <a:ln>
             <a:noFill/>
@@ -14381,7 +14381,7 @@
             <a:r>
               <a:rPr sz="1500" b="1" i="0">
                 <a:solidFill>
-                  <a:srgbClr val="166534"/>
+                  <a:srgbClr val="A5335F"/>
                 </a:solidFill>
                 <a:latin typeface="Verdana"/>
               </a:rPr>
@@ -14606,7 +14606,7 @@
             <a:r>
               <a:rPr sz="1300" b="1" i="0" spc="156">
                 <a:solidFill>
-                  <a:srgbClr val="166534"/>
+                  <a:srgbClr val="A5335F"/>
                 </a:solidFill>
                 <a:latin typeface="Verdana"/>
               </a:rPr>
@@ -14756,7 +14756,7 @@
             </a:avLst>
           </a:prstGeom>
           <a:solidFill>
-            <a:srgbClr val="E3F1E7"/>
+            <a:srgbClr val="FCE9F0"/>
           </a:solidFill>
           <a:ln>
             <a:noFill/>
@@ -14813,7 +14813,7 @@
             <a:r>
               <a:rPr sz="1500" b="1" i="0">
                 <a:solidFill>
-                  <a:srgbClr val="166534"/>
+                  <a:srgbClr val="A5335F"/>
                 </a:solidFill>
                 <a:latin typeface="Verdana"/>
               </a:rPr>
@@ -14924,7 +14924,7 @@
             </a:avLst>
           </a:prstGeom>
           <a:solidFill>
-            <a:srgbClr val="E3F1E7"/>
+            <a:srgbClr val="FCE9F0"/>
           </a:solidFill>
           <a:ln>
             <a:noFill/>
@@ -14981,7 +14981,7 @@
             <a:r>
               <a:rPr sz="1500" b="1" i="0">
                 <a:solidFill>
-                  <a:srgbClr val="166534"/>
+                  <a:srgbClr val="A5335F"/>
                 </a:solidFill>
                 <a:latin typeface="Verdana"/>
               </a:rPr>
@@ -15092,7 +15092,7 @@
             </a:avLst>
           </a:prstGeom>
           <a:solidFill>
-            <a:srgbClr val="E3F1E7"/>
+            <a:srgbClr val="FCE9F0"/>
           </a:solidFill>
           <a:ln>
             <a:noFill/>
@@ -15149,7 +15149,7 @@
             <a:r>
               <a:rPr sz="1500" b="1" i="0">
                 <a:solidFill>
-                  <a:srgbClr val="166534"/>
+                  <a:srgbClr val="A5335F"/>
                 </a:solidFill>
                 <a:latin typeface="Verdana"/>
               </a:rPr>
@@ -15260,7 +15260,7 @@
             </a:avLst>
           </a:prstGeom>
           <a:solidFill>
-            <a:srgbClr val="E3F1E7"/>
+            <a:srgbClr val="FCE9F0"/>
           </a:solidFill>
           <a:ln>
             <a:noFill/>
@@ -15317,7 +15317,7 @@
             <a:r>
               <a:rPr sz="1500" b="1" i="0">
                 <a:solidFill>
-                  <a:srgbClr val="166534"/>
+                  <a:srgbClr val="A5335F"/>
                 </a:solidFill>
                 <a:latin typeface="Verdana"/>
               </a:rPr>
@@ -15533,7 +15533,7 @@
             <a:r>
               <a:rPr sz="1300" b="1" i="0" spc="156">
                 <a:solidFill>
-                  <a:srgbClr val="166534"/>
+                  <a:srgbClr val="A5335F"/>
                 </a:solidFill>
                 <a:latin typeface="Verdana"/>
               </a:rPr>
@@ -15683,7 +15683,7 @@
             </a:avLst>
           </a:prstGeom>
           <a:solidFill>
-            <a:srgbClr val="E3F1E7"/>
+            <a:srgbClr val="FCE9F0"/>
           </a:solidFill>
           <a:ln>
             <a:noFill/>
@@ -15740,7 +15740,7 @@
             <a:r>
               <a:rPr sz="1500" b="1" i="0">
                 <a:solidFill>
-                  <a:srgbClr val="166534"/>
+                  <a:srgbClr val="A5335F"/>
                 </a:solidFill>
                 <a:latin typeface="Verdana"/>
               </a:rPr>
@@ -15860,7 +15860,7 @@
             </a:avLst>
           </a:prstGeom>
           <a:solidFill>
-            <a:srgbClr val="E3F1E7"/>
+            <a:srgbClr val="FCE9F0"/>
           </a:solidFill>
           <a:ln>
             <a:noFill/>
@@ -15917,7 +15917,7 @@
             <a:r>
               <a:rPr sz="1500" b="1" i="0">
                 <a:solidFill>
-                  <a:srgbClr val="166534"/>
+                  <a:srgbClr val="A5335F"/>
                 </a:solidFill>
                 <a:latin typeface="Verdana"/>
               </a:rPr>
@@ -16037,7 +16037,7 @@
             </a:avLst>
           </a:prstGeom>
           <a:solidFill>
-            <a:srgbClr val="E3F1E7"/>
+            <a:srgbClr val="FCE9F0"/>
           </a:solidFill>
           <a:ln>
             <a:noFill/>
@@ -16094,7 +16094,7 @@
             <a:r>
               <a:rPr sz="1500" b="1" i="0">
                 <a:solidFill>
-                  <a:srgbClr val="166534"/>
+                  <a:srgbClr val="A5335F"/>
                 </a:solidFill>
                 <a:latin typeface="Verdana"/>
               </a:rPr>
@@ -16214,7 +16214,7 @@
             </a:avLst>
           </a:prstGeom>
           <a:solidFill>
-            <a:srgbClr val="E3F1E7"/>
+            <a:srgbClr val="FCE9F0"/>
           </a:solidFill>
           <a:ln>
             <a:noFill/>
@@ -16271,7 +16271,7 @@
             <a:r>
               <a:rPr sz="1500" b="1" i="0">
                 <a:solidFill>
-                  <a:srgbClr val="166534"/>
+                  <a:srgbClr val="A5335F"/>
                 </a:solidFill>
                 <a:latin typeface="Verdana"/>
               </a:rPr>
